--- a/assets/figures-editable/c3-c4/c3-e16.pptx
+++ b/assets/figures-editable/c3-c4/c3-e16.pptx
@@ -3104,8 +3104,8 @@
         </p:nvSpPr>
         <p:spPr>
           <a:xfrm>
-            <a:off x="274320" y="137160"/>
-            <a:ext cx="11612880" cy="365760"/>
+            <a:off x="274320" y="118872"/>
+            <a:ext cx="11612880" cy="340105"/>
           </a:xfrm>
           <a:prstGeom prst="rect">
             <a:avLst/>
@@ -3114,7 +3114,7 @@
           <a:effectLst/>
         </p:spPr>
         <p:txBody>
-          <a:bodyPr wrap="square" lIns="27432" rIns="27432" tIns="18288" bIns="18288" anchor="ctr">
+          <a:bodyPr wrap="none" lIns="18288" rIns="18288" tIns="18288" bIns="18288" anchor="t">
             <a:spAutoFit/>
           </a:bodyPr>
           <a:lstStyle/>
@@ -3125,7 +3125,7 @@
               </a:spcAft>
             </a:pPr>
             <a:r>
-              <a:rPr sz="2100" b="0" i="0">
+              <a:rPr sz="1900" b="1" i="0">
                 <a:solidFill>
                   <a:srgbClr val="8EDBD4"/>
                 </a:solidFill>
@@ -3136,23 +3136,20 @@
           </a:p>
         </p:txBody>
       </p:sp>
-      <p:sp>
-        <p:nvSpPr>
-          <p:cNvPr id="3" name="C3-E16 rect 1" descr="sci-ppt:o001"/>
-          <p:cNvSpPr/>
+      <p:cxnSp>
+        <p:nvCxnSpPr>
+          <p:cNvPr id="3" name="C3-E16 line 1" descr="sci-ppt:o001"/>
+          <p:cNvCxnSpPr/>
           <p:nvPr/>
-        </p:nvSpPr>
-        <p:spPr>
-          <a:xfrm>
-            <a:off x="1005840" y="1417320"/>
-            <a:ext cx="9144000" cy="1005840"/>
-          </a:xfrm>
-          <a:prstGeom prst="rect">
+        </p:nvCxnSpPr>
+        <p:spPr>
+          <a:xfrm>
+            <a:off x="914400" y="5029200"/>
+            <a:ext cx="5852160" cy="0"/>
+          </a:xfrm>
+          <a:prstGeom prst="line">
             <a:avLst/>
           </a:prstGeom>
-          <a:solidFill>
-            <a:srgbClr val="213E4B"/>
-          </a:solidFill>
           <a:ln w="19050">
             <a:solidFill>
               <a:srgbClr val="B4C7D2"/>
@@ -3160,48 +3157,83 @@
           </a:ln>
           <a:effectLst/>
         </p:spPr>
-        <p:txBody>
-          <a:bodyPr rtlCol="0" anchor="ctr"/>
-          <a:lstStyle/>
-          <a:p>
-            <a:pPr algn="ctr"/>
-          </a:p>
-        </p:txBody>
-      </p:sp>
+      </p:cxnSp>
       <p:cxnSp>
         <p:nvCxnSpPr>
-          <p:cNvPr id="4" name="C3-E16 arrow 2" descr="sci-ppt:o002"/>
+          <p:cNvPr id="4" name="C3-E16 line 2" descr="sci-ppt:o002"/>
           <p:cNvCxnSpPr/>
           <p:nvPr/>
         </p:nvCxnSpPr>
         <p:spPr>
           <a:xfrm>
-            <a:off x="1280160" y="1920240"/>
-            <a:ext cx="8595360" cy="0"/>
+            <a:off x="914400" y="1371600"/>
+            <a:ext cx="0" cy="3657600"/>
           </a:xfrm>
           <a:prstGeom prst="line">
             <a:avLst/>
           </a:prstGeom>
-          <a:ln w="25400">
+          <a:ln w="19050">
             <a:solidFill>
-              <a:srgbClr val="8EDBD4"/>
+              <a:srgbClr val="B4C7D2"/>
             </a:solidFill>
-            <a:headEnd type="none" w="med" len="med"/>
-            <a:tailEnd type="triangle" w="med" len="med"/>
           </a:ln>
           <a:effectLst/>
         </p:spPr>
       </p:cxnSp>
-      <p:sp>
-        <p:nvSpPr>
-          <p:cNvPr id="5" name="C3-E16 text 3" descr="sci-ppt:o003"/>
+      <p:cxnSp>
+        <p:nvCxnSpPr>
+          <p:cNvPr id="5" name="C3-E16 line 3" descr="sci-ppt:o003"/>
+          <p:cNvCxnSpPr/>
+          <p:nvPr/>
+        </p:nvCxnSpPr>
+        <p:spPr>
+          <a:xfrm>
+            <a:off x="1548517" y="5029200"/>
+            <a:ext cx="0" cy="64008"/>
+          </a:xfrm>
+          <a:prstGeom prst="line">
+            <a:avLst/>
+          </a:prstGeom>
+          <a:ln w="12700">
+            <a:solidFill>
+              <a:srgbClr val="B4C7D2"/>
+            </a:solidFill>
+          </a:ln>
+          <a:effectLst/>
+        </p:spPr>
+      </p:cxnSp>
+      <p:cxnSp>
+        <p:nvCxnSpPr>
+          <p:cNvPr id="6" name="C3-E16 line 4" descr="sci-ppt:o004"/>
+          <p:cNvCxnSpPr/>
+          <p:nvPr/>
+        </p:nvCxnSpPr>
+        <p:spPr>
+          <a:xfrm>
+            <a:off x="1548517" y="1371600"/>
+            <a:ext cx="0" cy="3657600"/>
+          </a:xfrm>
+          <a:prstGeom prst="line">
+            <a:avLst/>
+          </a:prstGeom>
+          <a:ln w="7620">
+            <a:solidFill>
+              <a:srgbClr val="2E4756"/>
+            </a:solidFill>
+          </a:ln>
+          <a:effectLst/>
+        </p:spPr>
+      </p:cxnSp>
+      <p:sp>
+        <p:nvSpPr>
+          <p:cNvPr id="7" name="C3-E16 text 5" descr="sci-ppt:o005"/>
           <p:cNvSpPr txBox="1"/>
           <p:nvPr/>
         </p:nvSpPr>
         <p:spPr>
           <a:xfrm>
-            <a:off x="1005840" y="914400"/>
-            <a:ext cx="3657600" cy="365760"/>
+            <a:off x="1091317" y="5111496"/>
+            <a:ext cx="914400" cy="208407"/>
           </a:xfrm>
           <a:prstGeom prst="rect">
             <a:avLst/>
@@ -3210,104 +3242,24 @@
           <a:effectLst/>
         </p:spPr>
         <p:txBody>
-          <a:bodyPr wrap="square" lIns="27432" rIns="27432" tIns="18288" bIns="18288" anchor="ctr">
+          <a:bodyPr wrap="none" lIns="18288" rIns="18288" tIns="18288" bIns="18288" anchor="t">
             <a:spAutoFit/>
           </a:bodyPr>
           <a:lstStyle/>
           <a:p>
-            <a:pPr algn="l">
+            <a:pPr algn="ctr">
               <a:spcAft>
                 <a:spcPts val="0"/>
               </a:spcAft>
             </a:pPr>
             <a:r>
-              <a:rPr sz="1900" b="0" i="0">
+              <a:rPr sz="1050" b="0" i="0">
                 <a:solidFill>
-                  <a:srgbClr val="E7F0F3"/>
+                  <a:srgbClr val="B4C7D2"/>
                 </a:solidFill>
                 <a:latin typeface="Arial"/>
               </a:rPr>
-              <a:t>z = 0: Π = Π₀</a:t>
-            </a:r>
-          </a:p>
-        </p:txBody>
-      </p:sp>
-      <p:sp>
-        <p:nvSpPr>
-          <p:cNvPr id="6" name="C3-E16 text 4" descr="sci-ppt:o004"/>
-          <p:cNvSpPr txBox="1"/>
-          <p:nvPr/>
-        </p:nvSpPr>
-        <p:spPr>
-          <a:xfrm>
-            <a:off x="7589520" y="914400"/>
-            <a:ext cx="3657600" cy="365760"/>
-          </a:xfrm>
-          <a:prstGeom prst="rect">
-            <a:avLst/>
-          </a:prstGeom>
-          <a:noFill/>
-          <a:effectLst/>
-        </p:spPr>
-        <p:txBody>
-          <a:bodyPr wrap="square" lIns="27432" rIns="27432" tIns="18288" bIns="18288" anchor="ctr">
-            <a:spAutoFit/>
-          </a:bodyPr>
-          <a:lstStyle/>
-          <a:p>
-            <a:pPr algn="l">
-              <a:spcAft>
-                <a:spcPts val="0"/>
-              </a:spcAft>
-            </a:pPr>
-            <a:r>
-              <a:rPr sz="1900" b="0" i="0">
-                <a:solidFill>
-                  <a:srgbClr val="E7F0F3"/>
-                </a:solidFill>
-                <a:latin typeface="Arial"/>
-              </a:rPr>
-              <a:t>z = L: Π = 0</a:t>
-            </a:r>
-          </a:p>
-        </p:txBody>
-      </p:sp>
-      <p:sp>
-        <p:nvSpPr>
-          <p:cNvPr id="7" name="C3-E16 text 5" descr="sci-ppt:o005"/>
-          <p:cNvSpPr txBox="1"/>
-          <p:nvPr/>
-        </p:nvSpPr>
-        <p:spPr>
-          <a:xfrm>
-            <a:off x="2377440" y="2743200"/>
-            <a:ext cx="8229600" cy="548640"/>
-          </a:xfrm>
-          <a:prstGeom prst="rect">
-            <a:avLst/>
-          </a:prstGeom>
-          <a:noFill/>
-          <a:effectLst/>
-        </p:spPr>
-        <p:txBody>
-          <a:bodyPr wrap="square" lIns="27432" rIns="27432" tIns="18288" bIns="18288" anchor="ctr">
-            <a:spAutoFit/>
-          </a:bodyPr>
-          <a:lstStyle/>
-          <a:p>
-            <a:pPr algn="l">
-              <a:spcAft>
-                <a:spcPts val="0"/>
-              </a:spcAft>
-            </a:pPr>
-            <a:r>
-              <a:rPr sz="1800" b="0" i="0">
-                <a:solidFill>
-                  <a:srgbClr val="8EDBD4"/>
-                </a:solidFill>
-                <a:latin typeface="Arial"/>
-              </a:rPr>
-              <a:t>Δu = −∇Π/ρ; Π decreases in the launch direction.</a:t>
+              <a:t>1e-13</a:t>
             </a:r>
           </a:p>
         </p:txBody>
@@ -3320,30 +3272,52 @@
         </p:nvCxnSpPr>
         <p:spPr>
           <a:xfrm>
-            <a:off x="274320" y="3977639"/>
-            <a:ext cx="11612880" cy="0"/>
+            <a:off x="3655012" y="5029200"/>
+            <a:ext cx="0" cy="64008"/>
           </a:xfrm>
           <a:prstGeom prst="line">
             <a:avLst/>
           </a:prstGeom>
           <a:ln w="12700">
             <a:solidFill>
-              <a:srgbClr val="405967"/>
+              <a:srgbClr val="B4C7D2"/>
             </a:solidFill>
           </a:ln>
           <a:effectLst/>
         </p:spPr>
       </p:cxnSp>
-      <p:sp>
-        <p:nvSpPr>
-          <p:cNvPr id="9" name="C3-E16 text 7" descr="sci-ppt:o007"/>
+      <p:cxnSp>
+        <p:nvCxnSpPr>
+          <p:cNvPr id="9" name="C3-E16 line 7" descr="sci-ppt:o007"/>
+          <p:cNvCxnSpPr/>
+          <p:nvPr/>
+        </p:nvCxnSpPr>
+        <p:spPr>
+          <a:xfrm>
+            <a:off x="3655012" y="1371600"/>
+            <a:ext cx="0" cy="3657600"/>
+          </a:xfrm>
+          <a:prstGeom prst="line">
+            <a:avLst/>
+          </a:prstGeom>
+          <a:ln w="7620">
+            <a:solidFill>
+              <a:srgbClr val="2E4756"/>
+            </a:solidFill>
+          </a:ln>
+          <a:effectLst/>
+        </p:spPr>
+      </p:cxnSp>
+      <p:sp>
+        <p:nvSpPr>
+          <p:cNvPr id="10" name="C3-E16 text 8" descr="sci-ppt:o008"/>
           <p:cNvSpPr txBox="1"/>
           <p:nvPr/>
         </p:nvSpPr>
         <p:spPr>
           <a:xfrm>
-            <a:off x="320040" y="4096512"/>
-            <a:ext cx="5715000" cy="246888"/>
+            <a:off x="3197812" y="5111496"/>
+            <a:ext cx="914400" cy="208407"/>
           </a:xfrm>
           <a:prstGeom prst="rect">
             <a:avLst/>
@@ -3352,7 +3326,675 @@
           <a:effectLst/>
         </p:spPr>
         <p:txBody>
-          <a:bodyPr wrap="square" lIns="27432" rIns="27432" tIns="18288" bIns="18288" anchor="ctr">
+          <a:bodyPr wrap="none" lIns="18288" rIns="18288" tIns="18288" bIns="18288" anchor="t">
+            <a:spAutoFit/>
+          </a:bodyPr>
+          <a:lstStyle/>
+          <a:p>
+            <a:pPr algn="ctr">
+              <a:spcAft>
+                <a:spcPts val="0"/>
+              </a:spcAft>
+            </a:pPr>
+            <a:r>
+              <a:rPr sz="1050" b="0" i="0">
+                <a:solidFill>
+                  <a:srgbClr val="B4C7D2"/>
+                </a:solidFill>
+                <a:latin typeface="Arial"/>
+              </a:rPr>
+              <a:t>1e-12</a:t>
+            </a:r>
+          </a:p>
+        </p:txBody>
+      </p:sp>
+      <p:cxnSp>
+        <p:nvCxnSpPr>
+          <p:cNvPr id="11" name="C3-E16 line 9" descr="sci-ppt:o009"/>
+          <p:cNvCxnSpPr/>
+          <p:nvPr/>
+        </p:nvCxnSpPr>
+        <p:spPr>
+          <a:xfrm>
+            <a:off x="5761506" y="5029200"/>
+            <a:ext cx="0" cy="64008"/>
+          </a:xfrm>
+          <a:prstGeom prst="line">
+            <a:avLst/>
+          </a:prstGeom>
+          <a:ln w="12700">
+            <a:solidFill>
+              <a:srgbClr val="B4C7D2"/>
+            </a:solidFill>
+          </a:ln>
+          <a:effectLst/>
+        </p:spPr>
+      </p:cxnSp>
+      <p:cxnSp>
+        <p:nvCxnSpPr>
+          <p:cNvPr id="12" name="C3-E16 line 10" descr="sci-ppt:o010"/>
+          <p:cNvCxnSpPr/>
+          <p:nvPr/>
+        </p:nvCxnSpPr>
+        <p:spPr>
+          <a:xfrm>
+            <a:off x="5761506" y="1371600"/>
+            <a:ext cx="0" cy="3657600"/>
+          </a:xfrm>
+          <a:prstGeom prst="line">
+            <a:avLst/>
+          </a:prstGeom>
+          <a:ln w="7620">
+            <a:solidFill>
+              <a:srgbClr val="2E4756"/>
+            </a:solidFill>
+          </a:ln>
+          <a:effectLst/>
+        </p:spPr>
+      </p:cxnSp>
+      <p:sp>
+        <p:nvSpPr>
+          <p:cNvPr id="13" name="C3-E16 text 11" descr="sci-ppt:o011"/>
+          <p:cNvSpPr txBox="1"/>
+          <p:nvPr/>
+        </p:nvSpPr>
+        <p:spPr>
+          <a:xfrm>
+            <a:off x="5304306" y="5111496"/>
+            <a:ext cx="914400" cy="208407"/>
+          </a:xfrm>
+          <a:prstGeom prst="rect">
+            <a:avLst/>
+          </a:prstGeom>
+          <a:noFill/>
+          <a:effectLst/>
+        </p:spPr>
+        <p:txBody>
+          <a:bodyPr wrap="none" lIns="18288" rIns="18288" tIns="18288" bIns="18288" anchor="t">
+            <a:spAutoFit/>
+          </a:bodyPr>
+          <a:lstStyle/>
+          <a:p>
+            <a:pPr algn="ctr">
+              <a:spcAft>
+                <a:spcPts val="0"/>
+              </a:spcAft>
+            </a:pPr>
+            <a:r>
+              <a:rPr sz="1050" b="0" i="0">
+                <a:solidFill>
+                  <a:srgbClr val="B4C7D2"/>
+                </a:solidFill>
+                <a:latin typeface="Arial"/>
+              </a:rPr>
+              <a:t>1e-11</a:t>
+            </a:r>
+          </a:p>
+        </p:txBody>
+      </p:sp>
+      <p:cxnSp>
+        <p:nvCxnSpPr>
+          <p:cNvPr id="14" name="C3-E16 line 12" descr="sci-ppt:o012"/>
+          <p:cNvCxnSpPr/>
+          <p:nvPr/>
+        </p:nvCxnSpPr>
+        <p:spPr>
+          <a:xfrm>
+            <a:off x="850392" y="5029200"/>
+            <a:ext cx="64008" cy="0"/>
+          </a:xfrm>
+          <a:prstGeom prst="line">
+            <a:avLst/>
+          </a:prstGeom>
+          <a:ln w="12700">
+            <a:solidFill>
+              <a:srgbClr val="B4C7D2"/>
+            </a:solidFill>
+          </a:ln>
+          <a:effectLst/>
+        </p:spPr>
+      </p:cxnSp>
+      <p:cxnSp>
+        <p:nvCxnSpPr>
+          <p:cNvPr id="15" name="C3-E16 line 13" descr="sci-ppt:o013"/>
+          <p:cNvCxnSpPr/>
+          <p:nvPr/>
+        </p:nvCxnSpPr>
+        <p:spPr>
+          <a:xfrm>
+            <a:off x="914400" y="5029200"/>
+            <a:ext cx="5852160" cy="0"/>
+          </a:xfrm>
+          <a:prstGeom prst="line">
+            <a:avLst/>
+          </a:prstGeom>
+          <a:ln w="7620">
+            <a:solidFill>
+              <a:srgbClr val="2E4756"/>
+            </a:solidFill>
+          </a:ln>
+          <a:effectLst/>
+        </p:spPr>
+      </p:cxnSp>
+      <p:sp>
+        <p:nvSpPr>
+          <p:cNvPr id="16" name="C3-E16 text 14" descr="sci-ppt:o014"/>
+          <p:cNvSpPr txBox="1"/>
+          <p:nvPr/>
+        </p:nvSpPr>
+        <p:spPr>
+          <a:xfrm>
+            <a:off x="45720" y="4946904"/>
+            <a:ext cx="777240" cy="208407"/>
+          </a:xfrm>
+          <a:prstGeom prst="rect">
+            <a:avLst/>
+          </a:prstGeom>
+          <a:noFill/>
+          <a:effectLst/>
+        </p:spPr>
+        <p:txBody>
+          <a:bodyPr wrap="none" lIns="18288" rIns="18288" tIns="18288" bIns="18288" anchor="t">
+            <a:spAutoFit/>
+          </a:bodyPr>
+          <a:lstStyle/>
+          <a:p>
+            <a:pPr algn="r">
+              <a:spcAft>
+                <a:spcPts val="0"/>
+              </a:spcAft>
+            </a:pPr>
+            <a:r>
+              <a:rPr sz="1050" b="0" i="0">
+                <a:solidFill>
+                  <a:srgbClr val="B4C7D2"/>
+                </a:solidFill>
+                <a:latin typeface="Arial"/>
+              </a:rPr>
+              <a:t>3</a:t>
+            </a:r>
+          </a:p>
+        </p:txBody>
+      </p:sp>
+      <p:cxnSp>
+        <p:nvCxnSpPr>
+          <p:cNvPr id="17" name="C3-E16 line 15" descr="sci-ppt:o015"/>
+          <p:cNvCxnSpPr/>
+          <p:nvPr/>
+        </p:nvCxnSpPr>
+        <p:spPr>
+          <a:xfrm>
+            <a:off x="850392" y="4391706"/>
+            <a:ext cx="64008" cy="0"/>
+          </a:xfrm>
+          <a:prstGeom prst="line">
+            <a:avLst/>
+          </a:prstGeom>
+          <a:ln w="12700">
+            <a:solidFill>
+              <a:srgbClr val="B4C7D2"/>
+            </a:solidFill>
+          </a:ln>
+          <a:effectLst/>
+        </p:spPr>
+      </p:cxnSp>
+      <p:cxnSp>
+        <p:nvCxnSpPr>
+          <p:cNvPr id="18" name="C3-E16 line 16" descr="sci-ppt:o016"/>
+          <p:cNvCxnSpPr/>
+          <p:nvPr/>
+        </p:nvCxnSpPr>
+        <p:spPr>
+          <a:xfrm>
+            <a:off x="914400" y="4391706"/>
+            <a:ext cx="5852160" cy="0"/>
+          </a:xfrm>
+          <a:prstGeom prst="line">
+            <a:avLst/>
+          </a:prstGeom>
+          <a:ln w="7620">
+            <a:solidFill>
+              <a:srgbClr val="2E4756"/>
+            </a:solidFill>
+          </a:ln>
+          <a:effectLst/>
+        </p:spPr>
+      </p:cxnSp>
+      <p:sp>
+        <p:nvSpPr>
+          <p:cNvPr id="19" name="C3-E16 text 17" descr="sci-ppt:o017"/>
+          <p:cNvSpPr txBox="1"/>
+          <p:nvPr/>
+        </p:nvSpPr>
+        <p:spPr>
+          <a:xfrm>
+            <a:off x="45720" y="4309410"/>
+            <a:ext cx="777240" cy="208407"/>
+          </a:xfrm>
+          <a:prstGeom prst="rect">
+            <a:avLst/>
+          </a:prstGeom>
+          <a:noFill/>
+          <a:effectLst/>
+        </p:spPr>
+        <p:txBody>
+          <a:bodyPr wrap="none" lIns="18288" rIns="18288" tIns="18288" bIns="18288" anchor="t">
+            <a:spAutoFit/>
+          </a:bodyPr>
+          <a:lstStyle/>
+          <a:p>
+            <a:pPr algn="r">
+              <a:spcAft>
+                <a:spcPts val="0"/>
+              </a:spcAft>
+            </a:pPr>
+            <a:r>
+              <a:rPr sz="1050" b="0" i="0">
+                <a:solidFill>
+                  <a:srgbClr val="B4C7D2"/>
+                </a:solidFill>
+                <a:latin typeface="Arial"/>
+              </a:rPr>
+              <a:t>10</a:t>
+            </a:r>
+          </a:p>
+        </p:txBody>
+      </p:sp>
+      <p:cxnSp>
+        <p:nvCxnSpPr>
+          <p:cNvPr id="20" name="C3-E16 line 18" descr="sci-ppt:o018"/>
+          <p:cNvCxnSpPr/>
+          <p:nvPr/>
+        </p:nvCxnSpPr>
+        <p:spPr>
+          <a:xfrm>
+            <a:off x="850392" y="3810000"/>
+            <a:ext cx="64008" cy="0"/>
+          </a:xfrm>
+          <a:prstGeom prst="line">
+            <a:avLst/>
+          </a:prstGeom>
+          <a:ln w="12700">
+            <a:solidFill>
+              <a:srgbClr val="B4C7D2"/>
+            </a:solidFill>
+          </a:ln>
+          <a:effectLst/>
+        </p:spPr>
+      </p:cxnSp>
+      <p:cxnSp>
+        <p:nvCxnSpPr>
+          <p:cNvPr id="21" name="C3-E16 line 19" descr="sci-ppt:o019"/>
+          <p:cNvCxnSpPr/>
+          <p:nvPr/>
+        </p:nvCxnSpPr>
+        <p:spPr>
+          <a:xfrm>
+            <a:off x="914400" y="3810000"/>
+            <a:ext cx="5852160" cy="0"/>
+          </a:xfrm>
+          <a:prstGeom prst="line">
+            <a:avLst/>
+          </a:prstGeom>
+          <a:ln w="7620">
+            <a:solidFill>
+              <a:srgbClr val="2E4756"/>
+            </a:solidFill>
+          </a:ln>
+          <a:effectLst/>
+        </p:spPr>
+      </p:cxnSp>
+      <p:sp>
+        <p:nvSpPr>
+          <p:cNvPr id="22" name="C3-E16 text 20" descr="sci-ppt:o020"/>
+          <p:cNvSpPr txBox="1"/>
+          <p:nvPr/>
+        </p:nvSpPr>
+        <p:spPr>
+          <a:xfrm>
+            <a:off x="45720" y="3727704"/>
+            <a:ext cx="777240" cy="208407"/>
+          </a:xfrm>
+          <a:prstGeom prst="rect">
+            <a:avLst/>
+          </a:prstGeom>
+          <a:noFill/>
+          <a:effectLst/>
+        </p:spPr>
+        <p:txBody>
+          <a:bodyPr wrap="none" lIns="18288" rIns="18288" tIns="18288" bIns="18288" anchor="t">
+            <a:spAutoFit/>
+          </a:bodyPr>
+          <a:lstStyle/>
+          <a:p>
+            <a:pPr algn="r">
+              <a:spcAft>
+                <a:spcPts val="0"/>
+              </a:spcAft>
+            </a:pPr>
+            <a:r>
+              <a:rPr sz="1050" b="0" i="0">
+                <a:solidFill>
+                  <a:srgbClr val="B4C7D2"/>
+                </a:solidFill>
+                <a:latin typeface="Arial"/>
+              </a:rPr>
+              <a:t>30</a:t>
+            </a:r>
+          </a:p>
+        </p:txBody>
+      </p:sp>
+      <p:cxnSp>
+        <p:nvCxnSpPr>
+          <p:cNvPr id="23" name="C3-E16 line 21" descr="sci-ppt:o021"/>
+          <p:cNvCxnSpPr/>
+          <p:nvPr/>
+        </p:nvCxnSpPr>
+        <p:spPr>
+          <a:xfrm>
+            <a:off x="850392" y="3172506"/>
+            <a:ext cx="64008" cy="0"/>
+          </a:xfrm>
+          <a:prstGeom prst="line">
+            <a:avLst/>
+          </a:prstGeom>
+          <a:ln w="12700">
+            <a:solidFill>
+              <a:srgbClr val="B4C7D2"/>
+            </a:solidFill>
+          </a:ln>
+          <a:effectLst/>
+        </p:spPr>
+      </p:cxnSp>
+      <p:cxnSp>
+        <p:nvCxnSpPr>
+          <p:cNvPr id="24" name="C3-E16 line 22" descr="sci-ppt:o022"/>
+          <p:cNvCxnSpPr/>
+          <p:nvPr/>
+        </p:nvCxnSpPr>
+        <p:spPr>
+          <a:xfrm>
+            <a:off x="914400" y="3172506"/>
+            <a:ext cx="5852160" cy="0"/>
+          </a:xfrm>
+          <a:prstGeom prst="line">
+            <a:avLst/>
+          </a:prstGeom>
+          <a:ln w="7620">
+            <a:solidFill>
+              <a:srgbClr val="2E4756"/>
+            </a:solidFill>
+          </a:ln>
+          <a:effectLst/>
+        </p:spPr>
+      </p:cxnSp>
+      <p:sp>
+        <p:nvSpPr>
+          <p:cNvPr id="25" name="C3-E16 text 23" descr="sci-ppt:o023"/>
+          <p:cNvSpPr txBox="1"/>
+          <p:nvPr/>
+        </p:nvSpPr>
+        <p:spPr>
+          <a:xfrm>
+            <a:off x="45720" y="3090210"/>
+            <a:ext cx="777240" cy="208407"/>
+          </a:xfrm>
+          <a:prstGeom prst="rect">
+            <a:avLst/>
+          </a:prstGeom>
+          <a:noFill/>
+          <a:effectLst/>
+        </p:spPr>
+        <p:txBody>
+          <a:bodyPr wrap="none" lIns="18288" rIns="18288" tIns="18288" bIns="18288" anchor="t">
+            <a:spAutoFit/>
+          </a:bodyPr>
+          <a:lstStyle/>
+          <a:p>
+            <a:pPr algn="r">
+              <a:spcAft>
+                <a:spcPts val="0"/>
+              </a:spcAft>
+            </a:pPr>
+            <a:r>
+              <a:rPr sz="1050" b="0" i="0">
+                <a:solidFill>
+                  <a:srgbClr val="B4C7D2"/>
+                </a:solidFill>
+                <a:latin typeface="Arial"/>
+              </a:rPr>
+              <a:t>100</a:t>
+            </a:r>
+          </a:p>
+        </p:txBody>
+      </p:sp>
+      <p:cxnSp>
+        <p:nvCxnSpPr>
+          <p:cNvPr id="26" name="C3-E16 line 24" descr="sci-ppt:o024"/>
+          <p:cNvCxnSpPr/>
+          <p:nvPr/>
+        </p:nvCxnSpPr>
+        <p:spPr>
+          <a:xfrm>
+            <a:off x="850392" y="2590800"/>
+            <a:ext cx="64008" cy="0"/>
+          </a:xfrm>
+          <a:prstGeom prst="line">
+            <a:avLst/>
+          </a:prstGeom>
+          <a:ln w="12700">
+            <a:solidFill>
+              <a:srgbClr val="B4C7D2"/>
+            </a:solidFill>
+          </a:ln>
+          <a:effectLst/>
+        </p:spPr>
+      </p:cxnSp>
+      <p:cxnSp>
+        <p:nvCxnSpPr>
+          <p:cNvPr id="27" name="C3-E16 line 25" descr="sci-ppt:o025"/>
+          <p:cNvCxnSpPr/>
+          <p:nvPr/>
+        </p:nvCxnSpPr>
+        <p:spPr>
+          <a:xfrm>
+            <a:off x="914400" y="2590800"/>
+            <a:ext cx="5852160" cy="0"/>
+          </a:xfrm>
+          <a:prstGeom prst="line">
+            <a:avLst/>
+          </a:prstGeom>
+          <a:ln w="7620">
+            <a:solidFill>
+              <a:srgbClr val="2E4756"/>
+            </a:solidFill>
+          </a:ln>
+          <a:effectLst/>
+        </p:spPr>
+      </p:cxnSp>
+      <p:sp>
+        <p:nvSpPr>
+          <p:cNvPr id="28" name="C3-E16 text 26" descr="sci-ppt:o026"/>
+          <p:cNvSpPr txBox="1"/>
+          <p:nvPr/>
+        </p:nvSpPr>
+        <p:spPr>
+          <a:xfrm>
+            <a:off x="45720" y="2508504"/>
+            <a:ext cx="777240" cy="208407"/>
+          </a:xfrm>
+          <a:prstGeom prst="rect">
+            <a:avLst/>
+          </a:prstGeom>
+          <a:noFill/>
+          <a:effectLst/>
+        </p:spPr>
+        <p:txBody>
+          <a:bodyPr wrap="none" lIns="18288" rIns="18288" tIns="18288" bIns="18288" anchor="t">
+            <a:spAutoFit/>
+          </a:bodyPr>
+          <a:lstStyle/>
+          <a:p>
+            <a:pPr algn="r">
+              <a:spcAft>
+                <a:spcPts val="0"/>
+              </a:spcAft>
+            </a:pPr>
+            <a:r>
+              <a:rPr sz="1050" b="0" i="0">
+                <a:solidFill>
+                  <a:srgbClr val="B4C7D2"/>
+                </a:solidFill>
+                <a:latin typeface="Arial"/>
+              </a:rPr>
+              <a:t>300</a:t>
+            </a:r>
+          </a:p>
+        </p:txBody>
+      </p:sp>
+      <p:cxnSp>
+        <p:nvCxnSpPr>
+          <p:cNvPr id="29" name="C3-E16 line 27" descr="sci-ppt:o027"/>
+          <p:cNvCxnSpPr/>
+          <p:nvPr/>
+        </p:nvCxnSpPr>
+        <p:spPr>
+          <a:xfrm>
+            <a:off x="850392" y="1953306"/>
+            <a:ext cx="64008" cy="0"/>
+          </a:xfrm>
+          <a:prstGeom prst="line">
+            <a:avLst/>
+          </a:prstGeom>
+          <a:ln w="12700">
+            <a:solidFill>
+              <a:srgbClr val="B4C7D2"/>
+            </a:solidFill>
+          </a:ln>
+          <a:effectLst/>
+        </p:spPr>
+      </p:cxnSp>
+      <p:cxnSp>
+        <p:nvCxnSpPr>
+          <p:cNvPr id="30" name="C3-E16 line 28" descr="sci-ppt:o028"/>
+          <p:cNvCxnSpPr/>
+          <p:nvPr/>
+        </p:nvCxnSpPr>
+        <p:spPr>
+          <a:xfrm>
+            <a:off x="914400" y="1953306"/>
+            <a:ext cx="5852160" cy="0"/>
+          </a:xfrm>
+          <a:prstGeom prst="line">
+            <a:avLst/>
+          </a:prstGeom>
+          <a:ln w="7620">
+            <a:solidFill>
+              <a:srgbClr val="2E4756"/>
+            </a:solidFill>
+          </a:ln>
+          <a:effectLst/>
+        </p:spPr>
+      </p:cxnSp>
+      <p:sp>
+        <p:nvSpPr>
+          <p:cNvPr id="31" name="C3-E16 text 29" descr="sci-ppt:o029"/>
+          <p:cNvSpPr txBox="1"/>
+          <p:nvPr/>
+        </p:nvSpPr>
+        <p:spPr>
+          <a:xfrm>
+            <a:off x="45720" y="1871010"/>
+            <a:ext cx="777240" cy="208407"/>
+          </a:xfrm>
+          <a:prstGeom prst="rect">
+            <a:avLst/>
+          </a:prstGeom>
+          <a:noFill/>
+          <a:effectLst/>
+        </p:spPr>
+        <p:txBody>
+          <a:bodyPr wrap="none" lIns="18288" rIns="18288" tIns="18288" bIns="18288" anchor="t">
+            <a:spAutoFit/>
+          </a:bodyPr>
+          <a:lstStyle/>
+          <a:p>
+            <a:pPr algn="r">
+              <a:spcAft>
+                <a:spcPts val="0"/>
+              </a:spcAft>
+            </a:pPr>
+            <a:r>
+              <a:rPr sz="1050" b="0" i="0">
+                <a:solidFill>
+                  <a:srgbClr val="B4C7D2"/>
+                </a:solidFill>
+                <a:latin typeface="Arial"/>
+              </a:rPr>
+              <a:t>1000</a:t>
+            </a:r>
+          </a:p>
+        </p:txBody>
+      </p:sp>
+      <p:sp>
+        <p:nvSpPr>
+          <p:cNvPr id="32" name="C3-E16 text 30" descr="sci-ppt:o030"/>
+          <p:cNvSpPr txBox="1"/>
+          <p:nvPr/>
+        </p:nvSpPr>
+        <p:spPr>
+          <a:xfrm>
+            <a:off x="914400" y="5312664"/>
+            <a:ext cx="5852160" cy="231648"/>
+          </a:xfrm>
+          <a:prstGeom prst="rect">
+            <a:avLst/>
+          </a:prstGeom>
+          <a:noFill/>
+          <a:effectLst/>
+        </p:spPr>
+        <p:txBody>
+          <a:bodyPr wrap="none" lIns="18288" rIns="18288" tIns="18288" bIns="18288" anchor="t">
+            <a:spAutoFit/>
+          </a:bodyPr>
+          <a:lstStyle/>
+          <a:p>
+            <a:pPr algn="ctr">
+              <a:spcAft>
+                <a:spcPts val="0"/>
+              </a:spcAft>
+            </a:pPr>
+            <a:r>
+              <a:rPr sz="1200" b="0" i="0">
+                <a:solidFill>
+                  <a:srgbClr val="E7F0F3"/>
+                </a:solidFill>
+                <a:latin typeface="Arial"/>
+              </a:rPr>
+              <a:t>liquid mass m  (kg)</a:t>
+            </a:r>
+          </a:p>
+        </p:txBody>
+      </p:sp>
+      <p:sp>
+        <p:nvSpPr>
+          <p:cNvPr id="33" name="C3-E16 text 31" descr="sci-ppt:o031"/>
+          <p:cNvSpPr txBox="1"/>
+          <p:nvPr/>
+        </p:nvSpPr>
+        <p:spPr>
+          <a:xfrm>
+            <a:off x="365760" y="1024128"/>
+            <a:ext cx="5852160" cy="231648"/>
+          </a:xfrm>
+          <a:prstGeom prst="rect">
+            <a:avLst/>
+          </a:prstGeom>
+          <a:noFill/>
+          <a:effectLst/>
+        </p:spPr>
+        <p:txBody>
+          <a:bodyPr wrap="none" lIns="18288" rIns="18288" tIns="18288" bIns="18288" anchor="t">
             <a:spAutoFit/>
           </a:bodyPr>
           <a:lstStyle/>
@@ -3363,27 +4005,729 @@
               </a:spcAft>
             </a:pPr>
             <a:r>
-              <a:rPr sz="1150" b="0" i="0">
+              <a:rPr sz="1200" b="0" i="0">
                 <a:solidFill>
-                  <a:srgbClr val="B4C7D2"/>
+                  <a:srgbClr val="E7F0F3"/>
                 </a:solidFill>
                 <a:latin typeface="Arial"/>
               </a:rPr>
-              <a:t>• Π₀ at z = 0 source</a:t>
-            </a:r>
-          </a:p>
-        </p:txBody>
-      </p:sp>
-      <p:sp>
-        <p:nvSpPr>
-          <p:cNvPr id="10" name="C3-E16 text 8" descr="sci-ppt:o008"/>
+              <a:t>jet speed U  (m/s)</a:t>
+            </a:r>
+          </a:p>
+        </p:txBody>
+      </p:sp>
+      <p:sp>
+        <p:nvSpPr>
+          <p:cNvPr id="34" name="C3-E16 polygon 32" descr="sci-ppt:o032"/>
+          <p:cNvSpPr/>
+          <p:nvPr/>
+        </p:nvSpPr>
+        <p:spPr>
+          <a:xfrm>
+            <a:off x="916569" y="1467991"/>
+            <a:ext cx="5838607" cy="3379278"/>
+          </a:xfrm>
+          <a:custGeom>
+            <a:avLst/>
+            <a:gdLst/>
+            <a:ahLst/>
+            <a:cxnLst/>
+            <a:rect l="l" t="t" r="r" b="b"/>
+            <a:pathLst>
+              <a:path w="5838607" h="3379278">
+                <a:moveTo>
+                  <a:pt x="0" y="0"/>
+                </a:moveTo>
+                <a:lnTo>
+                  <a:pt x="59578" y="34482"/>
+                </a:lnTo>
+                <a:lnTo>
+                  <a:pt x="119155" y="68965"/>
+                </a:lnTo>
+                <a:lnTo>
+                  <a:pt x="178733" y="103447"/>
+                </a:lnTo>
+                <a:lnTo>
+                  <a:pt x="238311" y="137930"/>
+                </a:lnTo>
+                <a:lnTo>
+                  <a:pt x="297888" y="172412"/>
+                </a:lnTo>
+                <a:lnTo>
+                  <a:pt x="357466" y="206895"/>
+                </a:lnTo>
+                <a:lnTo>
+                  <a:pt x="417044" y="241377"/>
+                </a:lnTo>
+                <a:lnTo>
+                  <a:pt x="476621" y="275859"/>
+                </a:lnTo>
+                <a:lnTo>
+                  <a:pt x="536199" y="310342"/>
+                </a:lnTo>
+                <a:lnTo>
+                  <a:pt x="595776" y="344824"/>
+                </a:lnTo>
+                <a:lnTo>
+                  <a:pt x="655354" y="379307"/>
+                </a:lnTo>
+                <a:lnTo>
+                  <a:pt x="714932" y="413789"/>
+                </a:lnTo>
+                <a:lnTo>
+                  <a:pt x="774509" y="448272"/>
+                </a:lnTo>
+                <a:lnTo>
+                  <a:pt x="834087" y="482754"/>
+                </a:lnTo>
+                <a:lnTo>
+                  <a:pt x="893664" y="517236"/>
+                </a:lnTo>
+                <a:lnTo>
+                  <a:pt x="953242" y="551719"/>
+                </a:lnTo>
+                <a:lnTo>
+                  <a:pt x="1012820" y="586201"/>
+                </a:lnTo>
+                <a:lnTo>
+                  <a:pt x="1072397" y="620684"/>
+                </a:lnTo>
+                <a:lnTo>
+                  <a:pt x="1131975" y="655166"/>
+                </a:lnTo>
+                <a:lnTo>
+                  <a:pt x="1191553" y="689649"/>
+                </a:lnTo>
+                <a:lnTo>
+                  <a:pt x="1251130" y="724131"/>
+                </a:lnTo>
+                <a:lnTo>
+                  <a:pt x="1310708" y="758613"/>
+                </a:lnTo>
+                <a:lnTo>
+                  <a:pt x="1370285" y="793096"/>
+                </a:lnTo>
+                <a:lnTo>
+                  <a:pt x="1429863" y="827578"/>
+                </a:lnTo>
+                <a:lnTo>
+                  <a:pt x="1489441" y="862061"/>
+                </a:lnTo>
+                <a:lnTo>
+                  <a:pt x="1549018" y="896543"/>
+                </a:lnTo>
+                <a:lnTo>
+                  <a:pt x="1608596" y="931025"/>
+                </a:lnTo>
+                <a:lnTo>
+                  <a:pt x="1668174" y="965508"/>
+                </a:lnTo>
+                <a:lnTo>
+                  <a:pt x="1727751" y="999990"/>
+                </a:lnTo>
+                <a:lnTo>
+                  <a:pt x="1787329" y="1034473"/>
+                </a:lnTo>
+                <a:lnTo>
+                  <a:pt x="1846906" y="1068955"/>
+                </a:lnTo>
+                <a:lnTo>
+                  <a:pt x="1906484" y="1103438"/>
+                </a:lnTo>
+                <a:lnTo>
+                  <a:pt x="1966062" y="1137920"/>
+                </a:lnTo>
+                <a:lnTo>
+                  <a:pt x="2025639" y="1172402"/>
+                </a:lnTo>
+                <a:lnTo>
+                  <a:pt x="2085217" y="1206885"/>
+                </a:lnTo>
+                <a:lnTo>
+                  <a:pt x="2144794" y="1241367"/>
+                </a:lnTo>
+                <a:lnTo>
+                  <a:pt x="2204372" y="1275850"/>
+                </a:lnTo>
+                <a:lnTo>
+                  <a:pt x="2263950" y="1310332"/>
+                </a:lnTo>
+                <a:lnTo>
+                  <a:pt x="2323527" y="1344815"/>
+                </a:lnTo>
+                <a:lnTo>
+                  <a:pt x="2383105" y="1379297"/>
+                </a:lnTo>
+                <a:lnTo>
+                  <a:pt x="2442683" y="1413779"/>
+                </a:lnTo>
+                <a:lnTo>
+                  <a:pt x="2502260" y="1448262"/>
+                </a:lnTo>
+                <a:lnTo>
+                  <a:pt x="2561838" y="1482744"/>
+                </a:lnTo>
+                <a:lnTo>
+                  <a:pt x="2621415" y="1517227"/>
+                </a:lnTo>
+                <a:lnTo>
+                  <a:pt x="2680993" y="1551709"/>
+                </a:lnTo>
+                <a:lnTo>
+                  <a:pt x="2740571" y="1586192"/>
+                </a:lnTo>
+                <a:lnTo>
+                  <a:pt x="2800148" y="1620674"/>
+                </a:lnTo>
+                <a:lnTo>
+                  <a:pt x="2859726" y="1655156"/>
+                </a:lnTo>
+                <a:lnTo>
+                  <a:pt x="2919304" y="1689639"/>
+                </a:lnTo>
+                <a:lnTo>
+                  <a:pt x="2978881" y="1724121"/>
+                </a:lnTo>
+                <a:lnTo>
+                  <a:pt x="3038459" y="1758604"/>
+                </a:lnTo>
+                <a:lnTo>
+                  <a:pt x="3098036" y="1793086"/>
+                </a:lnTo>
+                <a:lnTo>
+                  <a:pt x="3157614" y="1827569"/>
+                </a:lnTo>
+                <a:lnTo>
+                  <a:pt x="3217192" y="1862051"/>
+                </a:lnTo>
+                <a:lnTo>
+                  <a:pt x="3276769" y="1896533"/>
+                </a:lnTo>
+                <a:lnTo>
+                  <a:pt x="3336347" y="1931016"/>
+                </a:lnTo>
+                <a:lnTo>
+                  <a:pt x="3395924" y="1965498"/>
+                </a:lnTo>
+                <a:lnTo>
+                  <a:pt x="3455502" y="1999981"/>
+                </a:lnTo>
+                <a:lnTo>
+                  <a:pt x="3515080" y="2034463"/>
+                </a:lnTo>
+                <a:lnTo>
+                  <a:pt x="3574657" y="2068945"/>
+                </a:lnTo>
+                <a:lnTo>
+                  <a:pt x="3634235" y="2103428"/>
+                </a:lnTo>
+                <a:lnTo>
+                  <a:pt x="3693813" y="2137910"/>
+                </a:lnTo>
+                <a:lnTo>
+                  <a:pt x="3753390" y="2172393"/>
+                </a:lnTo>
+                <a:lnTo>
+                  <a:pt x="3812968" y="2206875"/>
+                </a:lnTo>
+                <a:lnTo>
+                  <a:pt x="3872545" y="2241358"/>
+                </a:lnTo>
+                <a:lnTo>
+                  <a:pt x="3932123" y="2275840"/>
+                </a:lnTo>
+                <a:lnTo>
+                  <a:pt x="3991701" y="2310322"/>
+                </a:lnTo>
+                <a:lnTo>
+                  <a:pt x="4051278" y="2344805"/>
+                </a:lnTo>
+                <a:lnTo>
+                  <a:pt x="4110856" y="2379287"/>
+                </a:lnTo>
+                <a:lnTo>
+                  <a:pt x="4170434" y="2413770"/>
+                </a:lnTo>
+                <a:lnTo>
+                  <a:pt x="4230011" y="2448252"/>
+                </a:lnTo>
+                <a:lnTo>
+                  <a:pt x="4289589" y="2482735"/>
+                </a:lnTo>
+                <a:lnTo>
+                  <a:pt x="4349166" y="2517217"/>
+                </a:lnTo>
+                <a:lnTo>
+                  <a:pt x="4408744" y="2551699"/>
+                </a:lnTo>
+                <a:lnTo>
+                  <a:pt x="4468322" y="2586182"/>
+                </a:lnTo>
+                <a:lnTo>
+                  <a:pt x="4527899" y="2620664"/>
+                </a:lnTo>
+                <a:lnTo>
+                  <a:pt x="4587477" y="2655147"/>
+                </a:lnTo>
+                <a:lnTo>
+                  <a:pt x="4647054" y="2689629"/>
+                </a:lnTo>
+                <a:lnTo>
+                  <a:pt x="4706632" y="2724112"/>
+                </a:lnTo>
+                <a:lnTo>
+                  <a:pt x="4766210" y="2758594"/>
+                </a:lnTo>
+                <a:lnTo>
+                  <a:pt x="4825787" y="2793076"/>
+                </a:lnTo>
+                <a:lnTo>
+                  <a:pt x="4885365" y="2827559"/>
+                </a:lnTo>
+                <a:lnTo>
+                  <a:pt x="4944943" y="2862041"/>
+                </a:lnTo>
+                <a:lnTo>
+                  <a:pt x="5004520" y="2896524"/>
+                </a:lnTo>
+                <a:lnTo>
+                  <a:pt x="5064098" y="2931006"/>
+                </a:lnTo>
+                <a:lnTo>
+                  <a:pt x="5123675" y="2965489"/>
+                </a:lnTo>
+                <a:lnTo>
+                  <a:pt x="5183253" y="2999971"/>
+                </a:lnTo>
+                <a:lnTo>
+                  <a:pt x="5242831" y="3034453"/>
+                </a:lnTo>
+                <a:lnTo>
+                  <a:pt x="5302408" y="3068936"/>
+                </a:lnTo>
+                <a:lnTo>
+                  <a:pt x="5361986" y="3103418"/>
+                </a:lnTo>
+                <a:lnTo>
+                  <a:pt x="5421563" y="3137901"/>
+                </a:lnTo>
+                <a:lnTo>
+                  <a:pt x="5481141" y="3172383"/>
+                </a:lnTo>
+                <a:lnTo>
+                  <a:pt x="5540719" y="3206865"/>
+                </a:lnTo>
+                <a:lnTo>
+                  <a:pt x="5600296" y="3241348"/>
+                </a:lnTo>
+                <a:lnTo>
+                  <a:pt x="5659874" y="3275830"/>
+                </a:lnTo>
+                <a:lnTo>
+                  <a:pt x="5719452" y="3310313"/>
+                </a:lnTo>
+                <a:lnTo>
+                  <a:pt x="5779029" y="3344795"/>
+                </a:lnTo>
+                <a:lnTo>
+                  <a:pt x="5838607" y="3379278"/>
+                </a:lnTo>
+              </a:path>
+            </a:pathLst>
+          </a:custGeom>
+          <a:noFill/>
+          <a:ln w="38100">
+            <a:solidFill>
+              <a:srgbClr val="F28BA0"/>
+            </a:solidFill>
+          </a:ln>
+          <a:effectLst/>
+        </p:spPr>
+        <p:txBody>
+          <a:bodyPr rtlCol="0" anchor="ctr"/>
+          <a:lstStyle/>
+          <a:p>
+            <a:pPr algn="ctr"/>
+          </a:p>
+        </p:txBody>
+      </p:sp>
+      <p:sp>
+        <p:nvSpPr>
+          <p:cNvPr id="35" name="C3-E16 polygon 33" descr="sci-ppt:o033"/>
+          <p:cNvSpPr/>
+          <p:nvPr/>
+        </p:nvSpPr>
+        <p:spPr>
+          <a:xfrm>
+            <a:off x="916569" y="2622610"/>
+            <a:ext cx="5838607" cy="1689639"/>
+          </a:xfrm>
+          <a:custGeom>
+            <a:avLst/>
+            <a:gdLst/>
+            <a:ahLst/>
+            <a:cxnLst/>
+            <a:rect l="l" t="t" r="r" b="b"/>
+            <a:pathLst>
+              <a:path w="5838607" h="1689639">
+                <a:moveTo>
+                  <a:pt x="0" y="0"/>
+                </a:moveTo>
+                <a:lnTo>
+                  <a:pt x="59578" y="17241"/>
+                </a:lnTo>
+                <a:lnTo>
+                  <a:pt x="119155" y="34482"/>
+                </a:lnTo>
+                <a:lnTo>
+                  <a:pt x="178733" y="51724"/>
+                </a:lnTo>
+                <a:lnTo>
+                  <a:pt x="238311" y="68965"/>
+                </a:lnTo>
+                <a:lnTo>
+                  <a:pt x="297888" y="86206"/>
+                </a:lnTo>
+                <a:lnTo>
+                  <a:pt x="357466" y="103447"/>
+                </a:lnTo>
+                <a:lnTo>
+                  <a:pt x="417044" y="120688"/>
+                </a:lnTo>
+                <a:lnTo>
+                  <a:pt x="476621" y="137930"/>
+                </a:lnTo>
+                <a:lnTo>
+                  <a:pt x="536199" y="155171"/>
+                </a:lnTo>
+                <a:lnTo>
+                  <a:pt x="595776" y="172412"/>
+                </a:lnTo>
+                <a:lnTo>
+                  <a:pt x="655354" y="189653"/>
+                </a:lnTo>
+                <a:lnTo>
+                  <a:pt x="714932" y="206895"/>
+                </a:lnTo>
+                <a:lnTo>
+                  <a:pt x="774509" y="224136"/>
+                </a:lnTo>
+                <a:lnTo>
+                  <a:pt x="834087" y="241377"/>
+                </a:lnTo>
+                <a:lnTo>
+                  <a:pt x="893664" y="258618"/>
+                </a:lnTo>
+                <a:lnTo>
+                  <a:pt x="953242" y="275859"/>
+                </a:lnTo>
+                <a:lnTo>
+                  <a:pt x="1012820" y="293101"/>
+                </a:lnTo>
+                <a:lnTo>
+                  <a:pt x="1072397" y="310342"/>
+                </a:lnTo>
+                <a:lnTo>
+                  <a:pt x="1131975" y="327583"/>
+                </a:lnTo>
+                <a:lnTo>
+                  <a:pt x="1191553" y="344824"/>
+                </a:lnTo>
+                <a:lnTo>
+                  <a:pt x="1251130" y="362065"/>
+                </a:lnTo>
+                <a:lnTo>
+                  <a:pt x="1310708" y="379307"/>
+                </a:lnTo>
+                <a:lnTo>
+                  <a:pt x="1370285" y="396548"/>
+                </a:lnTo>
+                <a:lnTo>
+                  <a:pt x="1429863" y="413789"/>
+                </a:lnTo>
+                <a:lnTo>
+                  <a:pt x="1489441" y="431030"/>
+                </a:lnTo>
+                <a:lnTo>
+                  <a:pt x="1549018" y="448271"/>
+                </a:lnTo>
+                <a:lnTo>
+                  <a:pt x="1608596" y="465513"/>
+                </a:lnTo>
+                <a:lnTo>
+                  <a:pt x="1668174" y="482754"/>
+                </a:lnTo>
+                <a:lnTo>
+                  <a:pt x="1727751" y="499995"/>
+                </a:lnTo>
+                <a:lnTo>
+                  <a:pt x="1787329" y="517236"/>
+                </a:lnTo>
+                <a:lnTo>
+                  <a:pt x="1846906" y="534478"/>
+                </a:lnTo>
+                <a:lnTo>
+                  <a:pt x="1906484" y="551719"/>
+                </a:lnTo>
+                <a:lnTo>
+                  <a:pt x="1966062" y="568960"/>
+                </a:lnTo>
+                <a:lnTo>
+                  <a:pt x="2025639" y="586201"/>
+                </a:lnTo>
+                <a:lnTo>
+                  <a:pt x="2085217" y="603442"/>
+                </a:lnTo>
+                <a:lnTo>
+                  <a:pt x="2144794" y="620684"/>
+                </a:lnTo>
+                <a:lnTo>
+                  <a:pt x="2204372" y="637925"/>
+                </a:lnTo>
+                <a:lnTo>
+                  <a:pt x="2263950" y="655166"/>
+                </a:lnTo>
+                <a:lnTo>
+                  <a:pt x="2323527" y="672407"/>
+                </a:lnTo>
+                <a:lnTo>
+                  <a:pt x="2383105" y="689648"/>
+                </a:lnTo>
+                <a:lnTo>
+                  <a:pt x="2442683" y="706890"/>
+                </a:lnTo>
+                <a:lnTo>
+                  <a:pt x="2502260" y="724131"/>
+                </a:lnTo>
+                <a:lnTo>
+                  <a:pt x="2561838" y="741372"/>
+                </a:lnTo>
+                <a:lnTo>
+                  <a:pt x="2621415" y="758613"/>
+                </a:lnTo>
+                <a:lnTo>
+                  <a:pt x="2680993" y="775855"/>
+                </a:lnTo>
+                <a:lnTo>
+                  <a:pt x="2740571" y="793096"/>
+                </a:lnTo>
+                <a:lnTo>
+                  <a:pt x="2800148" y="810337"/>
+                </a:lnTo>
+                <a:lnTo>
+                  <a:pt x="2859726" y="827578"/>
+                </a:lnTo>
+                <a:lnTo>
+                  <a:pt x="2919304" y="844819"/>
+                </a:lnTo>
+                <a:lnTo>
+                  <a:pt x="2978881" y="862061"/>
+                </a:lnTo>
+                <a:lnTo>
+                  <a:pt x="3038459" y="879302"/>
+                </a:lnTo>
+                <a:lnTo>
+                  <a:pt x="3098036" y="896543"/>
+                </a:lnTo>
+                <a:lnTo>
+                  <a:pt x="3157614" y="913784"/>
+                </a:lnTo>
+                <a:lnTo>
+                  <a:pt x="3217192" y="931025"/>
+                </a:lnTo>
+                <a:lnTo>
+                  <a:pt x="3276769" y="948267"/>
+                </a:lnTo>
+                <a:lnTo>
+                  <a:pt x="3336347" y="965508"/>
+                </a:lnTo>
+                <a:lnTo>
+                  <a:pt x="3395924" y="982749"/>
+                </a:lnTo>
+                <a:lnTo>
+                  <a:pt x="3455502" y="999990"/>
+                </a:lnTo>
+                <a:lnTo>
+                  <a:pt x="3515080" y="1017231"/>
+                </a:lnTo>
+                <a:lnTo>
+                  <a:pt x="3574657" y="1034473"/>
+                </a:lnTo>
+                <a:lnTo>
+                  <a:pt x="3634235" y="1051714"/>
+                </a:lnTo>
+                <a:lnTo>
+                  <a:pt x="3693813" y="1068955"/>
+                </a:lnTo>
+                <a:lnTo>
+                  <a:pt x="3753390" y="1086196"/>
+                </a:lnTo>
+                <a:lnTo>
+                  <a:pt x="3812968" y="1103438"/>
+                </a:lnTo>
+                <a:lnTo>
+                  <a:pt x="3872545" y="1120679"/>
+                </a:lnTo>
+                <a:lnTo>
+                  <a:pt x="3932123" y="1137920"/>
+                </a:lnTo>
+                <a:lnTo>
+                  <a:pt x="3991701" y="1155161"/>
+                </a:lnTo>
+                <a:lnTo>
+                  <a:pt x="4051278" y="1172402"/>
+                </a:lnTo>
+                <a:lnTo>
+                  <a:pt x="4110856" y="1189644"/>
+                </a:lnTo>
+                <a:lnTo>
+                  <a:pt x="4170434" y="1206885"/>
+                </a:lnTo>
+                <a:lnTo>
+                  <a:pt x="4230011" y="1224126"/>
+                </a:lnTo>
+                <a:lnTo>
+                  <a:pt x="4289589" y="1241367"/>
+                </a:lnTo>
+                <a:lnTo>
+                  <a:pt x="4349166" y="1258608"/>
+                </a:lnTo>
+                <a:lnTo>
+                  <a:pt x="4408744" y="1275850"/>
+                </a:lnTo>
+                <a:lnTo>
+                  <a:pt x="4468322" y="1293091"/>
+                </a:lnTo>
+                <a:lnTo>
+                  <a:pt x="4527899" y="1310332"/>
+                </a:lnTo>
+                <a:lnTo>
+                  <a:pt x="4587477" y="1327573"/>
+                </a:lnTo>
+                <a:lnTo>
+                  <a:pt x="4647054" y="1344815"/>
+                </a:lnTo>
+                <a:lnTo>
+                  <a:pt x="4706632" y="1362056"/>
+                </a:lnTo>
+                <a:lnTo>
+                  <a:pt x="4766210" y="1379297"/>
+                </a:lnTo>
+                <a:lnTo>
+                  <a:pt x="4825787" y="1396538"/>
+                </a:lnTo>
+                <a:lnTo>
+                  <a:pt x="4885365" y="1413779"/>
+                </a:lnTo>
+                <a:lnTo>
+                  <a:pt x="4944943" y="1431021"/>
+                </a:lnTo>
+                <a:lnTo>
+                  <a:pt x="5004520" y="1448262"/>
+                </a:lnTo>
+                <a:lnTo>
+                  <a:pt x="5064098" y="1465503"/>
+                </a:lnTo>
+                <a:lnTo>
+                  <a:pt x="5123675" y="1482744"/>
+                </a:lnTo>
+                <a:lnTo>
+                  <a:pt x="5183253" y="1499985"/>
+                </a:lnTo>
+                <a:lnTo>
+                  <a:pt x="5242831" y="1517227"/>
+                </a:lnTo>
+                <a:lnTo>
+                  <a:pt x="5302408" y="1534468"/>
+                </a:lnTo>
+                <a:lnTo>
+                  <a:pt x="5361986" y="1551709"/>
+                </a:lnTo>
+                <a:lnTo>
+                  <a:pt x="5421563" y="1568950"/>
+                </a:lnTo>
+                <a:lnTo>
+                  <a:pt x="5481141" y="1586191"/>
+                </a:lnTo>
+                <a:lnTo>
+                  <a:pt x="5540719" y="1603433"/>
+                </a:lnTo>
+                <a:lnTo>
+                  <a:pt x="5600296" y="1620674"/>
+                </a:lnTo>
+                <a:lnTo>
+                  <a:pt x="5659874" y="1637915"/>
+                </a:lnTo>
+                <a:lnTo>
+                  <a:pt x="5719452" y="1655156"/>
+                </a:lnTo>
+                <a:lnTo>
+                  <a:pt x="5779029" y="1672398"/>
+                </a:lnTo>
+                <a:lnTo>
+                  <a:pt x="5838607" y="1689639"/>
+                </a:lnTo>
+              </a:path>
+            </a:pathLst>
+          </a:custGeom>
+          <a:noFill/>
+          <a:ln w="38100">
+            <a:solidFill>
+              <a:srgbClr val="8EDBD4"/>
+            </a:solidFill>
+          </a:ln>
+          <a:effectLst/>
+        </p:spPr>
+        <p:txBody>
+          <a:bodyPr rtlCol="0" anchor="ctr"/>
+          <a:lstStyle/>
+          <a:p>
+            <a:pPr algn="ctr"/>
+          </a:p>
+        </p:txBody>
+      </p:sp>
+      <p:sp>
+        <p:nvSpPr>
+          <p:cNvPr id="36" name="C3-E16 ellipse 34" descr="sci-ppt:o034"/>
+          <p:cNvSpPr/>
+          <p:nvPr/>
+        </p:nvSpPr>
+        <p:spPr>
+          <a:xfrm>
+            <a:off x="4833244" y="3704077"/>
+            <a:ext cx="146304" cy="146304"/>
+          </a:xfrm>
+          <a:prstGeom prst="ellipse">
+            <a:avLst/>
+          </a:prstGeom>
+          <a:solidFill>
+            <a:srgbClr val="F2B880"/>
+          </a:solidFill>
+          <a:ln w="12700">
+            <a:solidFill>
+              <a:srgbClr val="F2B880"/>
+            </a:solidFill>
+          </a:ln>
+          <a:effectLst/>
+        </p:spPr>
+        <p:txBody>
+          <a:bodyPr rtlCol="0" anchor="ctr"/>
+          <a:lstStyle/>
+          <a:p>
+            <a:pPr algn="ctr"/>
+          </a:p>
+        </p:txBody>
+      </p:sp>
+      <p:sp>
+        <p:nvSpPr>
+          <p:cNvPr id="37" name="C3-E16 text 35" descr="sci-ppt:o035"/>
           <p:cNvSpPr txBox="1"/>
           <p:nvPr/>
         </p:nvSpPr>
         <p:spPr>
           <a:xfrm>
-            <a:off x="6217920" y="4096512"/>
-            <a:ext cx="5715000" cy="246888"/>
+            <a:off x="1751716" y="3886957"/>
+            <a:ext cx="3017520" cy="231648"/>
           </a:xfrm>
           <a:prstGeom prst="rect">
             <a:avLst/>
@@ -3392,7 +4736,7 @@
           <a:effectLst/>
         </p:spPr>
         <p:txBody>
-          <a:bodyPr wrap="square" lIns="27432" rIns="27432" tIns="18288" bIns="18288" anchor="ctr">
+          <a:bodyPr wrap="none" lIns="18288" rIns="18288" tIns="18288" bIns="18288" anchor="t">
             <a:spAutoFit/>
           </a:bodyPr>
           <a:lstStyle/>
@@ -3403,27 +4747,27 @@
               </a:spcAft>
             </a:pPr>
             <a:r>
-              <a:rPr sz="1150" b="0" i="0">
+              <a:rPr sz="1200" b="0" i="0">
                 <a:solidFill>
-                  <a:srgbClr val="B4C7D2"/>
+                  <a:srgbClr val="F2B880"/>
                 </a:solidFill>
                 <a:latin typeface="Arial"/>
               </a:rPr>
-              <a:t>• Π = 0 at z = L free end</a:t>
-            </a:r>
-          </a:p>
-        </p:txBody>
-      </p:sp>
-      <p:sp>
-        <p:nvSpPr>
-          <p:cNvPr id="11" name="C3-E16 text 9" descr="sci-ppt:o009"/>
+              <a:t>3.93 ng, 31.9 m/s: the declared jet</a:t>
+            </a:r>
+          </a:p>
+        </p:txBody>
+      </p:sp>
+      <p:sp>
+        <p:nvSpPr>
+          <p:cNvPr id="38" name="C3-E16 text 36" descr="sci-ppt:o036"/>
           <p:cNvSpPr txBox="1"/>
           <p:nvPr/>
         </p:nvSpPr>
         <p:spPr>
           <a:xfrm>
-            <a:off x="320040" y="4329684"/>
-            <a:ext cx="5715000" cy="246888"/>
+            <a:off x="1154346" y="1811048"/>
+            <a:ext cx="2743200" cy="231648"/>
           </a:xfrm>
           <a:prstGeom prst="rect">
             <a:avLst/>
@@ -3432,7 +4776,7 @@
           <a:effectLst/>
         </p:spPr>
         <p:txBody>
-          <a:bodyPr wrap="square" lIns="27432" rIns="27432" tIns="18288" bIns="18288" anchor="ctr">
+          <a:bodyPr wrap="none" lIns="18288" rIns="18288" tIns="18288" bIns="18288" anchor="t">
             <a:spAutoFit/>
           </a:bodyPr>
           <a:lstStyle/>
@@ -3443,27 +4787,27 @@
               </a:spcAft>
             </a:pPr>
             <a:r>
-              <a:rPr sz="1150" b="0" i="0">
+              <a:rPr sz="1200" b="0" i="0">
                 <a:solidFill>
-                  <a:srgbClr val="B4C7D2"/>
+                  <a:srgbClr val="F28BA0"/>
                 </a:solidFill>
                 <a:latin typeface="Arial"/>
               </a:rPr>
-              <a:t>• A column area; L length</a:t>
-            </a:r>
-          </a:p>
-        </p:txBody>
-      </p:sp>
-      <p:sp>
-        <p:nvSpPr>
-          <p:cNvPr id="12" name="C3-E16 text 10" descr="sci-ppt:o010"/>
+              <a:t>fixed impulse J: U = J/m</a:t>
+            </a:r>
+          </a:p>
+        </p:txBody>
+      </p:sp>
+      <p:sp>
+        <p:nvSpPr>
+          <p:cNvPr id="39" name="C3-E16 text 37" descr="sci-ppt:o037"/>
           <p:cNvSpPr txBox="1"/>
           <p:nvPr/>
         </p:nvSpPr>
         <p:spPr>
           <a:xfrm>
-            <a:off x="6217920" y="4329684"/>
-            <a:ext cx="5715000" cy="246888"/>
+            <a:off x="2255787" y="2984528"/>
+            <a:ext cx="2926080" cy="231648"/>
           </a:xfrm>
           <a:prstGeom prst="rect">
             <a:avLst/>
@@ -3472,7 +4816,7 @@
           <a:effectLst/>
         </p:spPr>
         <p:txBody>
-          <a:bodyPr wrap="square" lIns="27432" rIns="27432" tIns="18288" bIns="18288" anchor="ctr">
+          <a:bodyPr wrap="none" lIns="18288" rIns="18288" tIns="18288" bIns="18288" anchor="t">
             <a:spAutoFit/>
           </a:bodyPr>
           <a:lstStyle/>
@@ -3483,27 +4827,59 @@
               </a:spcAft>
             </a:pPr>
             <a:r>
-              <a:rPr sz="1150" b="0" i="0">
+              <a:rPr sz="1200" b="0" i="0">
                 <a:solidFill>
-                  <a:srgbClr val="B4C7D2"/>
+                  <a:srgbClr val="8EDBD4"/>
                 </a:solidFill>
                 <a:latin typeface="Arial"/>
               </a:rPr>
-              <a:t>• Π(z), ∇Π → Δu</a:t>
-            </a:r>
-          </a:p>
-        </p:txBody>
-      </p:sp>
-      <p:sp>
-        <p:nvSpPr>
-          <p:cNvPr id="13" name="C3-E16 text 11" descr="sci-ppt:o011"/>
+              <a:t>fixed energy E: U = √(2E/m)</a:t>
+            </a:r>
+          </a:p>
+        </p:txBody>
+      </p:sp>
+      <p:sp>
+        <p:nvSpPr>
+          <p:cNvPr id="40" name="C3-E16 round_rect 38" descr="sci-ppt:o038"/>
+          <p:cNvSpPr/>
+          <p:nvPr/>
+        </p:nvSpPr>
+        <p:spPr>
+          <a:xfrm>
+            <a:off x="7040880" y="1371600"/>
+            <a:ext cx="4800600" cy="3657600"/>
+          </a:xfrm>
+          <a:prstGeom prst="roundRect">
+            <a:avLst/>
+          </a:prstGeom>
+          <a:solidFill>
+            <a:srgbClr val="213E4B"/>
+          </a:solidFill>
+          <a:ln w="20320">
+            <a:solidFill>
+              <a:srgbClr val="8EDBD4"/>
+            </a:solidFill>
+          </a:ln>
+          <a:effectLst/>
+        </p:spPr>
+        <p:txBody>
+          <a:bodyPr rtlCol="0" anchor="ctr"/>
+          <a:lstStyle/>
+          <a:p>
+            <a:pPr algn="ctr"/>
+          </a:p>
+        </p:txBody>
+      </p:sp>
+      <p:sp>
+        <p:nvSpPr>
+          <p:cNvPr id="41" name="C3-E16 text 39" descr="sci-ppt:o039"/>
           <p:cNvSpPr txBox="1"/>
           <p:nvPr/>
         </p:nvSpPr>
         <p:spPr>
           <a:xfrm>
-            <a:off x="320040" y="4562856"/>
-            <a:ext cx="5715000" cy="246888"/>
+            <a:off x="7150608" y="1426464"/>
+            <a:ext cx="4581144" cy="254889"/>
           </a:xfrm>
           <a:prstGeom prst="rect">
             <a:avLst/>
@@ -3512,7 +4888,7 @@
           <a:effectLst/>
         </p:spPr>
         <p:txBody>
-          <a:bodyPr wrap="square" lIns="27432" rIns="27432" tIns="18288" bIns="18288" anchor="ctr">
+          <a:bodyPr wrap="none" lIns="18288" rIns="18288" tIns="18288" bIns="18288" anchor="t">
             <a:spAutoFit/>
           </a:bodyPr>
           <a:lstStyle/>
@@ -3523,27 +4899,27 @@
               </a:spcAft>
             </a:pPr>
             <a:r>
-              <a:rPr sz="1150" b="0" i="0">
+              <a:rPr sz="1350" b="1" i="0">
                 <a:solidFill>
-                  <a:srgbClr val="B4C7D2"/>
+                  <a:srgbClr val="8EDBD4"/>
                 </a:solidFill>
                 <a:latin typeface="Arial"/>
               </a:rPr>
-              <a:t>• U = Π₀/(ρL)</a:t>
-            </a:r>
-          </a:p>
-        </p:txBody>
-      </p:sp>
-      <p:sp>
-        <p:nvSpPr>
-          <p:cNvPr id="14" name="C3-E16 text 12" descr="sci-ppt:o012"/>
+              <a:t>Two different budgets</a:t>
+            </a:r>
+          </a:p>
+        </p:txBody>
+      </p:sp>
+      <p:sp>
+        <p:nvSpPr>
+          <p:cNvPr id="42" name="C3-E16 text 40" descr="sci-ppt:o040"/>
           <p:cNvSpPr txBox="1"/>
           <p:nvPr/>
         </p:nvSpPr>
         <p:spPr>
           <a:xfrm>
-            <a:off x="6217920" y="4562856"/>
-            <a:ext cx="5715000" cy="246888"/>
+            <a:off x="7178040" y="1828800"/>
+            <a:ext cx="4572000" cy="433070"/>
           </a:xfrm>
           <a:prstGeom prst="rect">
             <a:avLst/>
@@ -3552,7 +4928,7 @@
           <a:effectLst/>
         </p:spPr>
         <p:txBody>
-          <a:bodyPr wrap="square" lIns="27432" rIns="27432" tIns="18288" bIns="18288" anchor="ctr">
+          <a:bodyPr wrap="none" lIns="18288" rIns="18288" tIns="18288" bIns="18288" anchor="t">
             <a:spAutoFit/>
           </a:bodyPr>
           <a:lstStyle/>
@@ -3563,27 +4939,43 @@
               </a:spcAft>
             </a:pPr>
             <a:r>
-              <a:rPr sz="1150" b="0" i="0">
+              <a:rPr sz="1250" b="1" i="0">
                 <a:solidFill>
-                  <a:srgbClr val="B4C7D2"/>
+                  <a:srgbClr val="E7F0F3"/>
                 </a:solidFill>
                 <a:latin typeface="Arial"/>
               </a:rPr>
-              <a:t>• m = ρAL; J = Π₀A</a:t>
-            </a:r>
-          </a:p>
-        </p:txBody>
-      </p:sp>
-      <p:sp>
-        <p:nvSpPr>
-          <p:cNvPr id="15" name="C3-E16 text 13" descr="sci-ppt:o013"/>
+              <a:t>Π(z) = Π₀(1 − z/L),  U = Π₀/(ρL)</a:t>
+            </a:r>
+          </a:p>
+          <a:p>
+            <a:pPr algn="l">
+              <a:spcAft>
+                <a:spcPts val="0"/>
+              </a:spcAft>
+            </a:pPr>
+            <a:r>
+              <a:rPr sz="1250" b="1" i="0">
+                <a:solidFill>
+                  <a:srgbClr val="E7F0F3"/>
+                </a:solidFill>
+                <a:latin typeface="Arial"/>
+              </a:rPr>
+              <a:t>m = ρAL,  J = Π₀A = mU</a:t>
+            </a:r>
+          </a:p>
+        </p:txBody>
+      </p:sp>
+      <p:sp>
+        <p:nvSpPr>
+          <p:cNvPr id="43" name="C3-E16 text 41" descr="sci-ppt:o041"/>
           <p:cNvSpPr txBox="1"/>
           <p:nvPr/>
         </p:nvSpPr>
         <p:spPr>
           <a:xfrm>
-            <a:off x="320040" y="4796028"/>
-            <a:ext cx="5715000" cy="246888"/>
+            <a:off x="7178040" y="2651760"/>
+            <a:ext cx="4572000" cy="239395"/>
           </a:xfrm>
           <a:prstGeom prst="rect">
             <a:avLst/>
@@ -3592,7 +4984,7 @@
           <a:effectLst/>
         </p:spPr>
         <p:txBody>
-          <a:bodyPr wrap="square" lIns="27432" rIns="27432" tIns="18288" bIns="18288" anchor="ctr">
+          <a:bodyPr wrap="none" lIns="18288" rIns="18288" tIns="18288" bIns="18288" anchor="t">
             <a:spAutoFit/>
           </a:bodyPr>
           <a:lstStyle/>
@@ -3603,27 +4995,27 @@
               </a:spcAft>
             </a:pPr>
             <a:r>
-              <a:rPr sz="1150" b="0" i="0">
+              <a:rPr sz="1250" b="1" i="0">
                 <a:solidFill>
-                  <a:srgbClr val="B4C7D2"/>
+                  <a:srgbClr val="F2B880"/>
                 </a:solidFill>
                 <a:latin typeface="Arial"/>
               </a:rPr>
-              <a:t>• E, fixed J vs fixed E</a:t>
-            </a:r>
-          </a:p>
-        </p:txBody>
-      </p:sp>
-      <p:sp>
-        <p:nvSpPr>
-          <p:cNvPr id="16" name="C3-E16 text 14" descr="sci-ppt:o014"/>
+              <a:t>J = 1.253e-10 N s,   E = 2.00 nJ</a:t>
+            </a:r>
+          </a:p>
+        </p:txBody>
+      </p:sp>
+      <p:sp>
+        <p:nvSpPr>
+          <p:cNvPr id="44" name="C3-E16 text 42" descr="sci-ppt:o042"/>
           <p:cNvSpPr txBox="1"/>
           <p:nvPr/>
         </p:nvSpPr>
         <p:spPr>
           <a:xfrm>
-            <a:off x="6217920" y="4796028"/>
-            <a:ext cx="5715000" cy="246888"/>
+            <a:off x="7379208" y="3154680"/>
+            <a:ext cx="4370832" cy="231648"/>
           </a:xfrm>
           <a:prstGeom prst="rect">
             <a:avLst/>
@@ -3632,7 +5024,7 @@
           <a:effectLst/>
         </p:spPr>
         <p:txBody>
-          <a:bodyPr wrap="square" lIns="27432" rIns="27432" tIns="18288" bIns="18288" anchor="ctr">
+          <a:bodyPr wrap="none" lIns="18288" rIns="18288" tIns="18288" bIns="18288" anchor="t">
             <a:spAutoFit/>
           </a:bodyPr>
           <a:lstStyle/>
@@ -3643,27 +5035,59 @@
               </a:spcAft>
             </a:pPr>
             <a:r>
-              <a:rPr sz="1150" b="0" i="0">
+              <a:rPr sz="1200" b="0" i="0">
                 <a:solidFill>
-                  <a:srgbClr val="B4C7D2"/>
+                  <a:srgbClr val="E7F0F3"/>
                 </a:solidFill>
                 <a:latin typeface="Arial"/>
               </a:rPr>
-              <a:t>• p, p_ref, x, t₀, τ_p, t</a:t>
-            </a:r>
-          </a:p>
-        </p:txBody>
-      </p:sp>
-      <p:sp>
-        <p:nvSpPr>
-          <p:cNvPr id="17" name="C3-E16 text 15" descr="sci-ppt:o015"/>
+              <a:t>Quarter the mass at fixed J: speed ×4, energy ×4.</a:t>
+            </a:r>
+          </a:p>
+        </p:txBody>
+      </p:sp>
+      <p:sp>
+        <p:nvSpPr>
+          <p:cNvPr id="45" name="C3-E16 ellipse 43" descr="sci-ppt:o043"/>
+          <p:cNvSpPr/>
+          <p:nvPr/>
+        </p:nvSpPr>
+        <p:spPr>
+          <a:xfrm>
+            <a:off x="7210044" y="3208020"/>
+            <a:ext cx="82296" cy="82296"/>
+          </a:xfrm>
+          <a:prstGeom prst="ellipse">
+            <a:avLst/>
+          </a:prstGeom>
+          <a:solidFill>
+            <a:srgbClr val="8EDBD4"/>
+          </a:solidFill>
+          <a:ln w="12700">
+            <a:solidFill>
+              <a:srgbClr val="8EDBD4"/>
+            </a:solidFill>
+          </a:ln>
+          <a:effectLst/>
+        </p:spPr>
+        <p:txBody>
+          <a:bodyPr rtlCol="0" anchor="ctr"/>
+          <a:lstStyle/>
+          <a:p>
+            <a:pPr algn="ctr"/>
+          </a:p>
+        </p:txBody>
+      </p:sp>
+      <p:sp>
+        <p:nvSpPr>
+          <p:cNvPr id="46" name="C3-E16 text 44" descr="sci-ppt:o044"/>
           <p:cNvSpPr txBox="1"/>
           <p:nvPr/>
         </p:nvSpPr>
         <p:spPr>
           <a:xfrm>
-            <a:off x="320040" y="5596128"/>
-            <a:ext cx="11430000" cy="292608"/>
+            <a:off x="7379208" y="3432048"/>
+            <a:ext cx="4370832" cy="231648"/>
           </a:xfrm>
           <a:prstGeom prst="rect">
             <a:avLst/>
@@ -3672,7 +5096,7 @@
           <a:effectLst/>
         </p:spPr>
         <p:txBody>
-          <a:bodyPr wrap="square" lIns="27432" rIns="27432" tIns="18288" bIns="18288" anchor="ctr">
+          <a:bodyPr wrap="none" lIns="18288" rIns="18288" tIns="18288" bIns="18288" anchor="t">
             <a:spAutoFit/>
           </a:bodyPr>
           <a:lstStyle/>
@@ -3683,27 +5107,59 @@
               </a:spcAft>
             </a:pPr>
             <a:r>
-              <a:rPr sz="1150" b="0" i="0">
+              <a:rPr sz="1200" b="0" i="0">
                 <a:solidFill>
-                  <a:srgbClr val="8EDBD4"/>
+                  <a:srgbClr val="E7F0F3"/>
                 </a:solidFill>
                 <a:latin typeface="Arial"/>
               </a:rPr>
-              <a:t>Fixed impulse per area is not fixed total impulse</a:t>
-            </a:r>
-          </a:p>
-        </p:txBody>
-      </p:sp>
-      <p:sp>
-        <p:nvSpPr>
-          <p:cNvPr id="18" name="C3-E16 text 16" descr="sci-ppt:o016"/>
+              <a:t>Quarter the mass at fixed E: speed ×2, momentum ÷2.</a:t>
+            </a:r>
+          </a:p>
+        </p:txBody>
+      </p:sp>
+      <p:sp>
+        <p:nvSpPr>
+          <p:cNvPr id="47" name="C3-E16 ellipse 45" descr="sci-ppt:o045"/>
+          <p:cNvSpPr/>
+          <p:nvPr/>
+        </p:nvSpPr>
+        <p:spPr>
+          <a:xfrm>
+            <a:off x="7210044" y="3485388"/>
+            <a:ext cx="82296" cy="82296"/>
+          </a:xfrm>
+          <a:prstGeom prst="ellipse">
+            <a:avLst/>
+          </a:prstGeom>
+          <a:solidFill>
+            <a:srgbClr val="8EDBD4"/>
+          </a:solidFill>
+          <a:ln w="12700">
+            <a:solidFill>
+              <a:srgbClr val="8EDBD4"/>
+            </a:solidFill>
+          </a:ln>
+          <a:effectLst/>
+        </p:spPr>
+        <p:txBody>
+          <a:bodyPr rtlCol="0" anchor="ctr"/>
+          <a:lstStyle/>
+          <a:p>
+            <a:pPr algn="ctr"/>
+          </a:p>
+        </p:txBody>
+      </p:sp>
+      <p:sp>
+        <p:nvSpPr>
+          <p:cNvPr id="48" name="C3-E16 text 46" descr="sci-ppt:o046"/>
           <p:cNvSpPr txBox="1"/>
           <p:nvPr/>
         </p:nvSpPr>
         <p:spPr>
           <a:xfrm>
-            <a:off x="320040" y="5870448"/>
-            <a:ext cx="11430000" cy="292608"/>
+            <a:off x="7379208" y="3709416"/>
+            <a:ext cx="4370832" cy="417576"/>
           </a:xfrm>
           <a:prstGeom prst="rect">
             <a:avLst/>
@@ -3712,7 +5168,7 @@
           <a:effectLst/>
         </p:spPr>
         <p:txBody>
-          <a:bodyPr wrap="square" lIns="27432" rIns="27432" tIns="18288" bIns="18288" anchor="ctr">
+          <a:bodyPr wrap="none" lIns="18288" rIns="18288" tIns="18288" bIns="18288" anchor="t">
             <a:spAutoFit/>
           </a:bodyPr>
           <a:lstStyle/>
@@ -3723,27 +5179,75 @@
               </a:spcAft>
             </a:pPr>
             <a:r>
-              <a:rPr sz="1150" b="0" i="0">
+              <a:rPr sz="1200" b="0" i="0">
                 <a:solidFill>
-                  <a:srgbClr val="8EDBD4"/>
+                  <a:srgbClr val="E7F0F3"/>
                 </a:solidFill>
                 <a:latin typeface="Arial"/>
               </a:rPr>
-              <a:t>At fixed total impulse, lower mass needs more energy</a:t>
-            </a:r>
-          </a:p>
-        </p:txBody>
-      </p:sp>
-      <p:sp>
-        <p:nvSpPr>
-          <p:cNvPr id="19" name="C3-E16 text 17" descr="sci-ppt:o017"/>
+              <a:t>The pressure-impulse field and the total energy must</a:t>
+            </a:r>
+          </a:p>
+          <a:p>
+            <a:pPr algn="l">
+              <a:spcAft>
+                <a:spcPts val="0"/>
+              </a:spcAft>
+            </a:pPr>
+            <a:r>
+              <a:rPr sz="1200" b="0" i="0">
+                <a:solidFill>
+                  <a:srgbClr val="E7F0F3"/>
+                </a:solidFill>
+                <a:latin typeface="Arial"/>
+              </a:rPr>
+              <a:t>both be satisfied.</a:t>
+            </a:r>
+          </a:p>
+        </p:txBody>
+      </p:sp>
+      <p:sp>
+        <p:nvSpPr>
+          <p:cNvPr id="49" name="C3-E16 ellipse 47" descr="sci-ppt:o047"/>
+          <p:cNvSpPr/>
+          <p:nvPr/>
+        </p:nvSpPr>
+        <p:spPr>
+          <a:xfrm>
+            <a:off x="7210044" y="3762756"/>
+            <a:ext cx="82296" cy="82296"/>
+          </a:xfrm>
+          <a:prstGeom prst="ellipse">
+            <a:avLst/>
+          </a:prstGeom>
+          <a:solidFill>
+            <a:srgbClr val="8EDBD4"/>
+          </a:solidFill>
+          <a:ln w="12700">
+            <a:solidFill>
+              <a:srgbClr val="8EDBD4"/>
+            </a:solidFill>
+          </a:ln>
+          <a:effectLst/>
+        </p:spPr>
+        <p:txBody>
+          <a:bodyPr rtlCol="0" anchor="ctr"/>
+          <a:lstStyle/>
+          <a:p>
+            <a:pPr algn="ctr"/>
+          </a:p>
+        </p:txBody>
+      </p:sp>
+      <p:sp>
+        <p:nvSpPr>
+          <p:cNvPr id="50" name="C3-E16 text 48" descr="sci-ppt:o048"/>
           <p:cNvSpPr txBox="1"/>
           <p:nvPr/>
         </p:nvSpPr>
         <p:spPr>
           <a:xfrm>
-            <a:off x="320040" y="6473952"/>
-            <a:ext cx="11430000" cy="256032"/>
+            <a:off x="914400" y="5733288"/>
+            <a:ext cx="10972800" cy="239395"/>
           </a:xfrm>
           <a:prstGeom prst="rect">
             <a:avLst/>
@@ -3752,7 +5256,47 @@
           <a:effectLst/>
         </p:spPr>
         <p:txBody>
-          <a:bodyPr wrap="square" lIns="27432" rIns="27432" tIns="18288" bIns="18288" anchor="ctr">
+          <a:bodyPr wrap="none" lIns="18288" rIns="18288" tIns="18288" bIns="18288" anchor="t">
+            <a:spAutoFit/>
+          </a:bodyPr>
+          <a:lstStyle/>
+          <a:p>
+            <a:pPr algn="l">
+              <a:spcAft>
+                <a:spcPts val="0"/>
+              </a:spcAft>
+            </a:pPr>
+            <a:r>
+              <a:rPr sz="1250" b="0" i="0">
+                <a:solidFill>
+                  <a:srgbClr val="E7F0F3"/>
+                </a:solidFill>
+                <a:latin typeface="Arial"/>
+              </a:rPr>
+              <a:t>Focusing a given source into a lighter jet buys speed only at a price set by which quantity is conserved.</a:t>
+            </a:r>
+          </a:p>
+        </p:txBody>
+      </p:sp>
+      <p:sp>
+        <p:nvSpPr>
+          <p:cNvPr id="51" name="C3-E16 text 49" descr="sci-ppt:o049"/>
+          <p:cNvSpPr txBox="1"/>
+          <p:nvPr/>
+        </p:nvSpPr>
+        <p:spPr>
+          <a:xfrm>
+            <a:off x="320040" y="6510528"/>
+            <a:ext cx="11521440" cy="200660"/>
+          </a:xfrm>
+          <a:prstGeom prst="rect">
+            <a:avLst/>
+          </a:prstGeom>
+          <a:noFill/>
+          <a:effectLst/>
+        </p:spPr>
+        <p:txBody>
+          <a:bodyPr wrap="none" lIns="18288" rIns="18288" tIns="18288" bIns="18288" anchor="t">
             <a:spAutoFit/>
           </a:bodyPr>
           <a:lstStyle/>
@@ -3769,7 +5313,7 @@
                 </a:solidFill>
                 <a:latin typeface="Arial"/>
               </a:rPr>
-              <a:t>Model schematic; geometry is not to scale.</a:t>
+              <a:t>Pressure-impulse column and focusing budgets of Eq. C3-E16 (m = 3.927 ng, E = 2 nJ).</a:t>
             </a:r>
           </a:p>
         </p:txBody>
